--- a/Pregrado/Trabajo de grado 3/Clases/Sesion 03 - Estructura del artículo · taller de introducción/Presentacion.pptx
+++ b/Pregrado/Trabajo de grado 3/Clases/Sesion 03 - Estructura del artículo · taller de introducción/Presentacion.pptx
@@ -3366,41 +3366,6 @@
           </a:p>
         </p:txBody>
       </p:sp>
-      <p:sp>
-        <p:nvSpPr>
-          <p:cNvPr id="7" name="TextBox 6"/>
-          <p:cNvSpPr txBox="1"/>
-          <p:nvPr/>
-        </p:nvSpPr>
-        <p:spPr>
-          <a:xfrm>
-            <a:off x="2194560" y="6446520"/>
-            <a:ext cx="5943600" cy="274320"/>
-          </a:xfrm>
-          <a:prstGeom prst="rect">
-            <a:avLst/>
-          </a:prstGeom>
-          <a:noFill/>
-        </p:spPr>
-        <p:txBody>
-          <a:bodyPr wrap="square" anchor="t" lIns="0" rIns="0" tIns="0" bIns="0">
-            <a:spAutoFit/>
-          </a:bodyPr>
-          <a:lstStyle/>
-          <a:p>
-            <a:pPr algn="l"/>
-            <a:r>
-              <a:rPr sz="1000" b="1" i="0">
-                <a:solidFill>
-                  <a:srgbClr val="8F989D"/>
-                </a:solidFill>
-                <a:latin typeface="Calibri"/>
-              </a:rPr>
-              <a:t>Inicio 5:10 pm</a:t>
-            </a:r>
-          </a:p>
-        </p:txBody>
-      </p:sp>
     </p:spTree>
   </p:cSld>
   <p:clrMapOvr>
@@ -3915,41 +3880,6 @@
         </p:nvSpPr>
         <p:spPr>
           <a:xfrm>
-            <a:off x="2194560" y="6446520"/>
-            <a:ext cx="5943600" cy="274320"/>
-          </a:xfrm>
-          <a:prstGeom prst="rect">
-            <a:avLst/>
-          </a:prstGeom>
-          <a:noFill/>
-        </p:spPr>
-        <p:txBody>
-          <a:bodyPr wrap="square" anchor="t" lIns="0" rIns="0" tIns="0" bIns="0">
-            <a:spAutoFit/>
-          </a:bodyPr>
-          <a:lstStyle/>
-          <a:p>
-            <a:pPr algn="l"/>
-            <a:r>
-              <a:rPr sz="1000" b="1" i="0">
-                <a:solidFill>
-                  <a:srgbClr val="8F989D"/>
-                </a:solidFill>
-                <a:latin typeface="Calibri"/>
-              </a:rPr>
-              <a:t>Inicio 5:10 pm</a:t>
-            </a:r>
-          </a:p>
-        </p:txBody>
-      </p:sp>
-      <p:sp>
-        <p:nvSpPr>
-          <p:cNvPr id="6" name="TextBox 5"/>
-          <p:cNvSpPr txBox="1"/>
-          <p:nvPr/>
-        </p:nvSpPr>
-        <p:spPr>
-          <a:xfrm>
             <a:off x="11094415" y="6446520"/>
             <a:ext cx="548640" cy="274320"/>
           </a:xfrm>
@@ -4160,41 +4090,6 @@
       <p:sp>
         <p:nvSpPr>
           <p:cNvPr id="5" name="TextBox 4"/>
-          <p:cNvSpPr txBox="1"/>
-          <p:nvPr/>
-        </p:nvSpPr>
-        <p:spPr>
-          <a:xfrm>
-            <a:off x="2194560" y="6446520"/>
-            <a:ext cx="5943600" cy="274320"/>
-          </a:xfrm>
-          <a:prstGeom prst="rect">
-            <a:avLst/>
-          </a:prstGeom>
-          <a:noFill/>
-        </p:spPr>
-        <p:txBody>
-          <a:bodyPr wrap="square" anchor="t" lIns="0" rIns="0" tIns="0" bIns="0">
-            <a:spAutoFit/>
-          </a:bodyPr>
-          <a:lstStyle/>
-          <a:p>
-            <a:pPr algn="l"/>
-            <a:r>
-              <a:rPr sz="1000" b="1" i="0">
-                <a:solidFill>
-                  <a:srgbClr val="8F989D"/>
-                </a:solidFill>
-                <a:latin typeface="Calibri"/>
-              </a:rPr>
-              <a:t>Inicio 5:10 pm</a:t>
-            </a:r>
-          </a:p>
-        </p:txBody>
-      </p:sp>
-      <p:sp>
-        <p:nvSpPr>
-          <p:cNvPr id="6" name="TextBox 5"/>
           <p:cNvSpPr txBox="1"/>
           <p:nvPr/>
         </p:nvSpPr>
@@ -4872,41 +4767,6 @@
         </p:nvSpPr>
         <p:spPr>
           <a:xfrm>
-            <a:off x="2194560" y="6446520"/>
-            <a:ext cx="5943600" cy="274320"/>
-          </a:xfrm>
-          <a:prstGeom prst="rect">
-            <a:avLst/>
-          </a:prstGeom>
-          <a:noFill/>
-        </p:spPr>
-        <p:txBody>
-          <a:bodyPr wrap="square" anchor="t" lIns="0" rIns="0" tIns="0" bIns="0">
-            <a:spAutoFit/>
-          </a:bodyPr>
-          <a:lstStyle/>
-          <a:p>
-            <a:pPr algn="l"/>
-            <a:r>
-              <a:rPr sz="1000" b="1" i="0">
-                <a:solidFill>
-                  <a:srgbClr val="8F989D"/>
-                </a:solidFill>
-                <a:latin typeface="Calibri"/>
-              </a:rPr>
-              <a:t>Inicio 5:10 pm</a:t>
-            </a:r>
-          </a:p>
-        </p:txBody>
-      </p:sp>
-      <p:sp>
-        <p:nvSpPr>
-          <p:cNvPr id="7" name="TextBox 6"/>
-          <p:cNvSpPr txBox="1"/>
-          <p:nvPr/>
-        </p:nvSpPr>
-        <p:spPr>
-          <a:xfrm>
             <a:off x="11094415" y="6446520"/>
             <a:ext cx="548640" cy="274320"/>
           </a:xfrm>
@@ -5347,41 +5207,6 @@
         </p:nvSpPr>
         <p:spPr>
           <a:xfrm>
-            <a:off x="2194560" y="6446520"/>
-            <a:ext cx="5943600" cy="274320"/>
-          </a:xfrm>
-          <a:prstGeom prst="rect">
-            <a:avLst/>
-          </a:prstGeom>
-          <a:noFill/>
-        </p:spPr>
-        <p:txBody>
-          <a:bodyPr wrap="square" anchor="t" lIns="0" rIns="0" tIns="0" bIns="0">
-            <a:spAutoFit/>
-          </a:bodyPr>
-          <a:lstStyle/>
-          <a:p>
-            <a:pPr algn="l"/>
-            <a:r>
-              <a:rPr sz="1000" b="1" i="0">
-                <a:solidFill>
-                  <a:srgbClr val="8F989D"/>
-                </a:solidFill>
-                <a:latin typeface="Calibri"/>
-              </a:rPr>
-              <a:t>Inicio 5:10 pm</a:t>
-            </a:r>
-          </a:p>
-        </p:txBody>
-      </p:sp>
-      <p:sp>
-        <p:nvSpPr>
-          <p:cNvPr id="11" name="TextBox 10"/>
-          <p:cNvSpPr txBox="1"/>
-          <p:nvPr/>
-        </p:nvSpPr>
-        <p:spPr>
-          <a:xfrm>
             <a:off x="11094415" y="6446520"/>
             <a:ext cx="548640" cy="274320"/>
           </a:xfrm>
@@ -5728,41 +5553,6 @@
         </p:nvSpPr>
         <p:spPr>
           <a:xfrm>
-            <a:off x="2194560" y="6446520"/>
-            <a:ext cx="5943600" cy="274320"/>
-          </a:xfrm>
-          <a:prstGeom prst="rect">
-            <a:avLst/>
-          </a:prstGeom>
-          <a:noFill/>
-        </p:spPr>
-        <p:txBody>
-          <a:bodyPr wrap="square" anchor="t" lIns="0" rIns="0" tIns="0" bIns="0">
-            <a:spAutoFit/>
-          </a:bodyPr>
-          <a:lstStyle/>
-          <a:p>
-            <a:pPr algn="l"/>
-            <a:r>
-              <a:rPr sz="1000" b="1" i="0">
-                <a:solidFill>
-                  <a:srgbClr val="8F989D"/>
-                </a:solidFill>
-                <a:latin typeface="Calibri"/>
-              </a:rPr>
-              <a:t>Inicio 5:10 pm</a:t>
-            </a:r>
-          </a:p>
-        </p:txBody>
-      </p:sp>
-      <p:sp>
-        <p:nvSpPr>
-          <p:cNvPr id="9" name="TextBox 8"/>
-          <p:cNvSpPr txBox="1"/>
-          <p:nvPr/>
-        </p:nvSpPr>
-        <p:spPr>
-          <a:xfrm>
             <a:off x="11094415" y="6446520"/>
             <a:ext cx="548640" cy="274320"/>
           </a:xfrm>
@@ -6205,8 +5995,8 @@
         </p:nvSpPr>
         <p:spPr>
           <a:xfrm>
-            <a:off x="2194560" y="6446520"/>
-            <a:ext cx="5943600" cy="274320"/>
+            <a:off x="11094415" y="6446520"/>
+            <a:ext cx="548640" cy="274320"/>
           </a:xfrm>
           <a:prstGeom prst="rect">
             <a:avLst/>
@@ -6219,7 +6009,7 @@
           </a:bodyPr>
           <a:lstStyle/>
           <a:p>
-            <a:pPr algn="l"/>
+            <a:pPr algn="r"/>
             <a:r>
               <a:rPr sz="1000" b="1" i="0">
                 <a:solidFill>
@@ -6227,7 +6017,7 @@
                 </a:solidFill>
                 <a:latin typeface="Calibri"/>
               </a:rPr>
-              <a:t>Inicio 5:10 pm</a:t>
+              <a:t>15</a:t>
             </a:r>
           </a:p>
         </p:txBody>
@@ -6235,41 +6025,6 @@
       <p:sp>
         <p:nvSpPr>
           <p:cNvPr id="6" name="TextBox 5"/>
-          <p:cNvSpPr txBox="1"/>
-          <p:nvPr/>
-        </p:nvSpPr>
-        <p:spPr>
-          <a:xfrm>
-            <a:off x="11094415" y="6446520"/>
-            <a:ext cx="548640" cy="274320"/>
-          </a:xfrm>
-          <a:prstGeom prst="rect">
-            <a:avLst/>
-          </a:prstGeom>
-          <a:noFill/>
-        </p:spPr>
-        <p:txBody>
-          <a:bodyPr wrap="square" anchor="t" lIns="0" rIns="0" tIns="0" bIns="0">
-            <a:spAutoFit/>
-          </a:bodyPr>
-          <a:lstStyle/>
-          <a:p>
-            <a:pPr algn="r"/>
-            <a:r>
-              <a:rPr sz="1000" b="1" i="0">
-                <a:solidFill>
-                  <a:srgbClr val="8F989D"/>
-                </a:solidFill>
-                <a:latin typeface="Calibri"/>
-              </a:rPr>
-              <a:t>15</a:t>
-            </a:r>
-          </a:p>
-        </p:txBody>
-      </p:sp>
-      <p:sp>
-        <p:nvSpPr>
-          <p:cNvPr id="7" name="TextBox 6"/>
           <p:cNvSpPr txBox="1"/>
           <p:nvPr/>
         </p:nvSpPr>
@@ -6723,41 +6478,6 @@
         </p:nvSpPr>
         <p:spPr>
           <a:xfrm>
-            <a:off x="2194560" y="6446520"/>
-            <a:ext cx="5943600" cy="274320"/>
-          </a:xfrm>
-          <a:prstGeom prst="rect">
-            <a:avLst/>
-          </a:prstGeom>
-          <a:noFill/>
-        </p:spPr>
-        <p:txBody>
-          <a:bodyPr wrap="square" anchor="t" lIns="0" rIns="0" tIns="0" bIns="0">
-            <a:spAutoFit/>
-          </a:bodyPr>
-          <a:lstStyle/>
-          <a:p>
-            <a:pPr algn="l"/>
-            <a:r>
-              <a:rPr sz="1000" b="1" i="0">
-                <a:solidFill>
-                  <a:srgbClr val="8F989D"/>
-                </a:solidFill>
-                <a:latin typeface="Calibri"/>
-              </a:rPr>
-              <a:t>Inicio 5:10 pm</a:t>
-            </a:r>
-          </a:p>
-        </p:txBody>
-      </p:sp>
-      <p:sp>
-        <p:nvSpPr>
-          <p:cNvPr id="11" name="TextBox 10"/>
-          <p:cNvSpPr txBox="1"/>
-          <p:nvPr/>
-        </p:nvSpPr>
-        <p:spPr>
-          <a:xfrm>
             <a:off x="11094415" y="6446520"/>
             <a:ext cx="548640" cy="274320"/>
           </a:xfrm>
@@ -7104,41 +6824,6 @@
         </p:nvSpPr>
         <p:spPr>
           <a:xfrm>
-            <a:off x="2194560" y="6446520"/>
-            <a:ext cx="5943600" cy="274320"/>
-          </a:xfrm>
-          <a:prstGeom prst="rect">
-            <a:avLst/>
-          </a:prstGeom>
-          <a:noFill/>
-        </p:spPr>
-        <p:txBody>
-          <a:bodyPr wrap="square" anchor="t" lIns="0" rIns="0" tIns="0" bIns="0">
-            <a:spAutoFit/>
-          </a:bodyPr>
-          <a:lstStyle/>
-          <a:p>
-            <a:pPr algn="l"/>
-            <a:r>
-              <a:rPr sz="1000" b="1" i="0">
-                <a:solidFill>
-                  <a:srgbClr val="8F989D"/>
-                </a:solidFill>
-                <a:latin typeface="Calibri"/>
-              </a:rPr>
-              <a:t>Inicio 5:10 pm</a:t>
-            </a:r>
-          </a:p>
-        </p:txBody>
-      </p:sp>
-      <p:sp>
-        <p:nvSpPr>
-          <p:cNvPr id="9" name="TextBox 8"/>
-          <p:cNvSpPr txBox="1"/>
-          <p:nvPr/>
-        </p:nvSpPr>
-        <p:spPr>
-          <a:xfrm>
             <a:off x="11094415" y="6446520"/>
             <a:ext cx="548640" cy="274320"/>
           </a:xfrm>
@@ -7531,41 +7216,6 @@
         </p:nvSpPr>
         <p:spPr>
           <a:xfrm>
-            <a:off x="2194560" y="6446520"/>
-            <a:ext cx="5943600" cy="274320"/>
-          </a:xfrm>
-          <a:prstGeom prst="rect">
-            <a:avLst/>
-          </a:prstGeom>
-          <a:noFill/>
-        </p:spPr>
-        <p:txBody>
-          <a:bodyPr wrap="square" anchor="t" lIns="0" rIns="0" tIns="0" bIns="0">
-            <a:spAutoFit/>
-          </a:bodyPr>
-          <a:lstStyle/>
-          <a:p>
-            <a:pPr algn="l"/>
-            <a:r>
-              <a:rPr sz="1000" b="1" i="0">
-                <a:solidFill>
-                  <a:srgbClr val="8F989D"/>
-                </a:solidFill>
-                <a:latin typeface="Calibri"/>
-              </a:rPr>
-              <a:t>Inicio 5:10 pm</a:t>
-            </a:r>
-          </a:p>
-        </p:txBody>
-      </p:sp>
-      <p:sp>
-        <p:nvSpPr>
-          <p:cNvPr id="6" name="TextBox 5"/>
-          <p:cNvSpPr txBox="1"/>
-          <p:nvPr/>
-        </p:nvSpPr>
-        <p:spPr>
-          <a:xfrm>
             <a:off x="11094415" y="6446520"/>
             <a:ext cx="548640" cy="274320"/>
           </a:xfrm>
@@ -7812,41 +7462,6 @@
           </a:p>
         </p:txBody>
       </p:sp>
-      <p:sp>
-        <p:nvSpPr>
-          <p:cNvPr id="7" name="TextBox 6"/>
-          <p:cNvSpPr txBox="1"/>
-          <p:nvPr/>
-        </p:nvSpPr>
-        <p:spPr>
-          <a:xfrm>
-            <a:off x="2194560" y="6446520"/>
-            <a:ext cx="5943600" cy="274320"/>
-          </a:xfrm>
-          <a:prstGeom prst="rect">
-            <a:avLst/>
-          </a:prstGeom>
-          <a:noFill/>
-        </p:spPr>
-        <p:txBody>
-          <a:bodyPr wrap="square" anchor="t" lIns="0" rIns="0" tIns="0" bIns="0">
-            <a:spAutoFit/>
-          </a:bodyPr>
-          <a:lstStyle/>
-          <a:p>
-            <a:pPr algn="l"/>
-            <a:r>
-              <a:rPr sz="1000" b="1" i="0">
-                <a:solidFill>
-                  <a:srgbClr val="8F989D"/>
-                </a:solidFill>
-                <a:latin typeface="Calibri"/>
-              </a:rPr>
-              <a:t>Inicio 5:10 pm</a:t>
-            </a:r>
-          </a:p>
-        </p:txBody>
-      </p:sp>
     </p:spTree>
   </p:cSld>
   <p:clrMapOvr>
@@ -8203,8 +7818,8 @@
         </p:nvSpPr>
         <p:spPr>
           <a:xfrm>
-            <a:off x="2194560" y="6446520"/>
-            <a:ext cx="5943600" cy="274320"/>
+            <a:off x="11094415" y="6446520"/>
+            <a:ext cx="548640" cy="274320"/>
           </a:xfrm>
           <a:prstGeom prst="rect">
             <a:avLst/>
@@ -8217,7 +7832,7 @@
           </a:bodyPr>
           <a:lstStyle/>
           <a:p>
-            <a:pPr algn="l"/>
+            <a:pPr algn="r"/>
             <a:r>
               <a:rPr sz="1000" b="1" i="0">
                 <a:solidFill>
@@ -8225,7 +7840,7 @@
                 </a:solidFill>
                 <a:latin typeface="Calibri"/>
               </a:rPr>
-              <a:t>Inicio 5:10 pm</a:t>
+              <a:t>2</a:t>
             </a:r>
           </a:p>
         </p:txBody>
@@ -8233,41 +7848,6 @@
       <p:sp>
         <p:nvSpPr>
           <p:cNvPr id="6" name="TextBox 5"/>
-          <p:cNvSpPr txBox="1"/>
-          <p:nvPr/>
-        </p:nvSpPr>
-        <p:spPr>
-          <a:xfrm>
-            <a:off x="11094415" y="6446520"/>
-            <a:ext cx="548640" cy="274320"/>
-          </a:xfrm>
-          <a:prstGeom prst="rect">
-            <a:avLst/>
-          </a:prstGeom>
-          <a:noFill/>
-        </p:spPr>
-        <p:txBody>
-          <a:bodyPr wrap="square" anchor="t" lIns="0" rIns="0" tIns="0" bIns="0">
-            <a:spAutoFit/>
-          </a:bodyPr>
-          <a:lstStyle/>
-          <a:p>
-            <a:pPr algn="r"/>
-            <a:r>
-              <a:rPr sz="1000" b="1" i="0">
-                <a:solidFill>
-                  <a:srgbClr val="8F989D"/>
-                </a:solidFill>
-                <a:latin typeface="Calibri"/>
-              </a:rPr>
-              <a:t>2</a:t>
-            </a:r>
-          </a:p>
-        </p:txBody>
-      </p:sp>
-      <p:sp>
-        <p:nvSpPr>
-          <p:cNvPr id="7" name="TextBox 6"/>
           <p:cNvSpPr txBox="1"/>
           <p:nvPr/>
         </p:nvSpPr>
@@ -9157,41 +8737,6 @@
         </p:nvSpPr>
         <p:spPr>
           <a:xfrm>
-            <a:off x="2194560" y="6446520"/>
-            <a:ext cx="5943600" cy="274320"/>
-          </a:xfrm>
-          <a:prstGeom prst="rect">
-            <a:avLst/>
-          </a:prstGeom>
-          <a:noFill/>
-        </p:spPr>
-        <p:txBody>
-          <a:bodyPr wrap="square" anchor="t" lIns="0" rIns="0" tIns="0" bIns="0">
-            <a:spAutoFit/>
-          </a:bodyPr>
-          <a:lstStyle/>
-          <a:p>
-            <a:pPr algn="l"/>
-            <a:r>
-              <a:rPr sz="1000" b="1" i="0">
-                <a:solidFill>
-                  <a:srgbClr val="8F989D"/>
-                </a:solidFill>
-                <a:latin typeface="Calibri"/>
-              </a:rPr>
-              <a:t>Inicio 5:10 pm</a:t>
-            </a:r>
-          </a:p>
-        </p:txBody>
-      </p:sp>
-      <p:sp>
-        <p:nvSpPr>
-          <p:cNvPr id="7" name="TextBox 6"/>
-          <p:cNvSpPr txBox="1"/>
-          <p:nvPr/>
-        </p:nvSpPr>
-        <p:spPr>
-          <a:xfrm>
             <a:off x="11094415" y="6446520"/>
             <a:ext cx="548640" cy="274320"/>
           </a:xfrm>
@@ -9591,41 +9136,6 @@
         </p:nvSpPr>
         <p:spPr>
           <a:xfrm>
-            <a:off x="2194560" y="6446520"/>
-            <a:ext cx="5943600" cy="274320"/>
-          </a:xfrm>
-          <a:prstGeom prst="rect">
-            <a:avLst/>
-          </a:prstGeom>
-          <a:noFill/>
-        </p:spPr>
-        <p:txBody>
-          <a:bodyPr wrap="square" anchor="t" lIns="0" rIns="0" tIns="0" bIns="0">
-            <a:spAutoFit/>
-          </a:bodyPr>
-          <a:lstStyle/>
-          <a:p>
-            <a:pPr algn="l"/>
-            <a:r>
-              <a:rPr sz="1000" b="1" i="0">
-                <a:solidFill>
-                  <a:srgbClr val="8F989D"/>
-                </a:solidFill>
-                <a:latin typeface="Calibri"/>
-              </a:rPr>
-              <a:t>Inicio 5:10 pm</a:t>
-            </a:r>
-          </a:p>
-        </p:txBody>
-      </p:sp>
-      <p:sp>
-        <p:nvSpPr>
-          <p:cNvPr id="6" name="TextBox 5"/>
-          <p:cNvSpPr txBox="1"/>
-          <p:nvPr/>
-        </p:nvSpPr>
-        <p:spPr>
-          <a:xfrm>
             <a:off x="11094415" y="6446520"/>
             <a:ext cx="548640" cy="274320"/>
           </a:xfrm>
@@ -10043,8 +9553,8 @@
         </p:nvSpPr>
         <p:spPr>
           <a:xfrm>
-            <a:off x="2194560" y="6446520"/>
-            <a:ext cx="5943600" cy="274320"/>
+            <a:off x="11094415" y="6446520"/>
+            <a:ext cx="548640" cy="274320"/>
           </a:xfrm>
           <a:prstGeom prst="rect">
             <a:avLst/>
@@ -10057,7 +9567,7 @@
           </a:bodyPr>
           <a:lstStyle/>
           <a:p>
-            <a:pPr algn="l"/>
+            <a:pPr algn="r"/>
             <a:r>
               <a:rPr sz="1000" b="1" i="0">
                 <a:solidFill>
@@ -10065,7 +9575,7 @@
                 </a:solidFill>
                 <a:latin typeface="Calibri"/>
               </a:rPr>
-              <a:t>Inicio 5:10 pm</a:t>
+              <a:t>5</a:t>
             </a:r>
           </a:p>
         </p:txBody>
@@ -10073,41 +9583,6 @@
       <p:sp>
         <p:nvSpPr>
           <p:cNvPr id="6" name="TextBox 5"/>
-          <p:cNvSpPr txBox="1"/>
-          <p:nvPr/>
-        </p:nvSpPr>
-        <p:spPr>
-          <a:xfrm>
-            <a:off x="11094415" y="6446520"/>
-            <a:ext cx="548640" cy="274320"/>
-          </a:xfrm>
-          <a:prstGeom prst="rect">
-            <a:avLst/>
-          </a:prstGeom>
-          <a:noFill/>
-        </p:spPr>
-        <p:txBody>
-          <a:bodyPr wrap="square" anchor="t" lIns="0" rIns="0" tIns="0" bIns="0">
-            <a:spAutoFit/>
-          </a:bodyPr>
-          <a:lstStyle/>
-          <a:p>
-            <a:pPr algn="r"/>
-            <a:r>
-              <a:rPr sz="1000" b="1" i="0">
-                <a:solidFill>
-                  <a:srgbClr val="8F989D"/>
-                </a:solidFill>
-                <a:latin typeface="Calibri"/>
-              </a:rPr>
-              <a:t>5</a:t>
-            </a:r>
-          </a:p>
-        </p:txBody>
-      </p:sp>
-      <p:sp>
-        <p:nvSpPr>
-          <p:cNvPr id="7" name="TextBox 6"/>
           <p:cNvSpPr txBox="1"/>
           <p:nvPr/>
         </p:nvSpPr>
@@ -10847,41 +10322,6 @@
         </p:nvSpPr>
         <p:spPr>
           <a:xfrm>
-            <a:off x="2194560" y="6446520"/>
-            <a:ext cx="5943600" cy="274320"/>
-          </a:xfrm>
-          <a:prstGeom prst="rect">
-            <a:avLst/>
-          </a:prstGeom>
-          <a:noFill/>
-        </p:spPr>
-        <p:txBody>
-          <a:bodyPr wrap="square" anchor="t" lIns="0" rIns="0" tIns="0" bIns="0">
-            <a:spAutoFit/>
-          </a:bodyPr>
-          <a:lstStyle/>
-          <a:p>
-            <a:pPr algn="l"/>
-            <a:r>
-              <a:rPr sz="1000" b="1" i="0">
-                <a:solidFill>
-                  <a:srgbClr val="8F989D"/>
-                </a:solidFill>
-                <a:latin typeface="Calibri"/>
-              </a:rPr>
-              <a:t>Inicio 5:10 pm</a:t>
-            </a:r>
-          </a:p>
-        </p:txBody>
-      </p:sp>
-      <p:sp>
-        <p:nvSpPr>
-          <p:cNvPr id="7" name="TextBox 6"/>
-          <p:cNvSpPr txBox="1"/>
-          <p:nvPr/>
-        </p:nvSpPr>
-        <p:spPr>
-          <a:xfrm>
             <a:off x="11094415" y="6446520"/>
             <a:ext cx="548640" cy="274320"/>
           </a:xfrm>
@@ -11267,41 +10707,6 @@
         </p:nvSpPr>
         <p:spPr>
           <a:xfrm>
-            <a:off x="2194560" y="6446520"/>
-            <a:ext cx="5943600" cy="274320"/>
-          </a:xfrm>
-          <a:prstGeom prst="rect">
-            <a:avLst/>
-          </a:prstGeom>
-          <a:noFill/>
-        </p:spPr>
-        <p:txBody>
-          <a:bodyPr wrap="square" anchor="t" lIns="0" rIns="0" tIns="0" bIns="0">
-            <a:spAutoFit/>
-          </a:bodyPr>
-          <a:lstStyle/>
-          <a:p>
-            <a:pPr algn="l"/>
-            <a:r>
-              <a:rPr sz="1000" b="1" i="0">
-                <a:solidFill>
-                  <a:srgbClr val="8F989D"/>
-                </a:solidFill>
-                <a:latin typeface="Calibri"/>
-              </a:rPr>
-              <a:t>Inicio 5:10 pm</a:t>
-            </a:r>
-          </a:p>
-        </p:txBody>
-      </p:sp>
-      <p:sp>
-        <p:nvSpPr>
-          <p:cNvPr id="6" name="TextBox 5"/>
-          <p:cNvSpPr txBox="1"/>
-          <p:nvPr/>
-        </p:nvSpPr>
-        <p:spPr>
-          <a:xfrm>
             <a:off x="11094415" y="6446520"/>
             <a:ext cx="548640" cy="274320"/>
           </a:xfrm>
@@ -11751,41 +11156,6 @@
         </p:nvSpPr>
         <p:spPr>
           <a:xfrm>
-            <a:off x="2194560" y="6446520"/>
-            <a:ext cx="5943600" cy="274320"/>
-          </a:xfrm>
-          <a:prstGeom prst="rect">
-            <a:avLst/>
-          </a:prstGeom>
-          <a:noFill/>
-        </p:spPr>
-        <p:txBody>
-          <a:bodyPr wrap="square" anchor="t" lIns="0" rIns="0" tIns="0" bIns="0">
-            <a:spAutoFit/>
-          </a:bodyPr>
-          <a:lstStyle/>
-          <a:p>
-            <a:pPr algn="l"/>
-            <a:r>
-              <a:rPr sz="1000" b="1" i="0">
-                <a:solidFill>
-                  <a:srgbClr val="8F989D"/>
-                </a:solidFill>
-                <a:latin typeface="Calibri"/>
-              </a:rPr>
-              <a:t>Inicio 5:10 pm</a:t>
-            </a:r>
-          </a:p>
-        </p:txBody>
-      </p:sp>
-      <p:sp>
-        <p:nvSpPr>
-          <p:cNvPr id="11" name="TextBox 10"/>
-          <p:cNvSpPr txBox="1"/>
-          <p:nvPr/>
-        </p:nvSpPr>
-        <p:spPr>
-          <a:xfrm>
             <a:off x="11094415" y="6446520"/>
             <a:ext cx="548640" cy="274320"/>
           </a:xfrm>
@@ -12015,41 +11385,6 @@
       <p:sp>
         <p:nvSpPr>
           <p:cNvPr id="6" name="TextBox 5"/>
-          <p:cNvSpPr txBox="1"/>
-          <p:nvPr/>
-        </p:nvSpPr>
-        <p:spPr>
-          <a:xfrm>
-            <a:off x="2194560" y="6446520"/>
-            <a:ext cx="5943600" cy="274320"/>
-          </a:xfrm>
-          <a:prstGeom prst="rect">
-            <a:avLst/>
-          </a:prstGeom>
-          <a:noFill/>
-        </p:spPr>
-        <p:txBody>
-          <a:bodyPr wrap="square" anchor="t" lIns="0" rIns="0" tIns="0" bIns="0">
-            <a:spAutoFit/>
-          </a:bodyPr>
-          <a:lstStyle/>
-          <a:p>
-            <a:pPr algn="l"/>
-            <a:r>
-              <a:rPr sz="1000" b="1" i="0">
-                <a:solidFill>
-                  <a:srgbClr val="8F989D"/>
-                </a:solidFill>
-                <a:latin typeface="Calibri"/>
-              </a:rPr>
-              <a:t>Inicio 5:10 pm</a:t>
-            </a:r>
-          </a:p>
-        </p:txBody>
-      </p:sp>
-      <p:sp>
-        <p:nvSpPr>
-          <p:cNvPr id="7" name="TextBox 6"/>
           <p:cNvSpPr txBox="1"/>
           <p:nvPr/>
         </p:nvSpPr>
